--- a/dist/초2/수학/자료와규칙/초2_수학_자료와규칙_01_분류하기.pptx
+++ b/dist/초2/수학/자료와규칙/초2_수학_자료와규칙_01_분류하기.pptx
@@ -122,13 +122,13 @@
   <p:extLst>
     <p:ext uri="{521415D9-36F7-43E2-AB2F-B90AF26B5E84}">
       <p14:sectionLst xmlns:p14="http://schemas.microsoft.com/office/powerpoint/2010/main">
-        <p14:section name="도입" id="{8dc4e7ee-8f82-41fc-8a9f-86edce0f8c6e}">
+        <p14:section name="도입" id="{629eef6c-67ef-1877-5774-e854b1437d59}">
           <p14:sldIdLst>
             <p14:sldId id="256"/>
             <p14:sldId id="257"/>
           </p14:sldIdLst>
         </p14:section>
-        <p14:section name="개념" id="{f49d96e1-648c-e384-7688-63f37fb6c4a1}">
+        <p14:section name="개념" id="{b53c7d02-76bd-9bec-1720-a374ed1a6563}">
           <p14:sldIdLst>
             <p14:sldId id="258"/>
             <p14:sldId id="259"/>
@@ -137,7 +137,7 @@
             <p14:sldId id="264"/>
           </p14:sldIdLst>
         </p14:section>
-        <p14:section name="연습" id="{6bcf8ca2-9686-6a53-c1b8-ce22b3da90ea}">
+        <p14:section name="연습" id="{889bad62-7761-5e67-dcfb-6b5a26474f83}">
           <p14:sldIdLst>
             <p14:sldId id="261"/>
             <p14:sldId id="262"/>
@@ -145,25 +145,25 @@
             <p14:sldId id="266"/>
           </p14:sldIdLst>
         </p14:section>
-        <p14:section name="개념" id="{3213a633-e97a-71ba-94e3-97557fc72266}">
+        <p14:section name="개념" id="{1699f077-0817-62d0-e954-bf6e4ac90c21}">
           <p14:sldIdLst/>
         </p14:section>
-        <p14:section name="연습" id="{dbd84c60-6ef7-c6b4-b03e-e98ac8096409}">
+        <p14:section name="연습" id="{e393aaa0-be32-395c-47a8-a2f6ca42e309}">
           <p14:sldIdLst/>
         </p14:section>
-        <p14:section name="확인" id="{ea70c610-1285-922e-e2cd-46372e6bfa6c}">
+        <p14:section name="확인" id="{dc1901d6-b78e-7c82-b5db-ae31f97fef59}">
           <p14:sldIdLst>
             <p14:sldId id="267"/>
             <p14:sldId id="268"/>
             <p14:sldId id="269"/>
           </p14:sldIdLst>
         </p14:section>
-        <p14:section name="정리" id="{12a8634b-dcbb-f68b-a321-fa2a34adaad7}">
+        <p14:section name="정리" id="{6712d2a4-5bd6-499e-081a-4ef0d1e22846}">
           <p14:sldIdLst>
             <p14:sldId id="270"/>
           </p14:sldIdLst>
         </p14:section>
-        <p14:section name="보충" id="{18d84cb3-f142-0774-ce88-e1206d63aad2}">
+        <p14:section name="보충" id="{e9414156-9e1e-1564-5786-441700687136}">
           <p14:sldIdLst>
             <p14:sldId id="271"/>
           </p14:sldIdLst>
@@ -10124,7 +10124,7 @@
         </p:nvSpPr>
         <p:spPr>
           <a:xfrm>
-            <a:off x="548640" y="2459736"/>
+            <a:off x="548640" y="2734056"/>
             <a:ext cx="566928" cy="566928"/>
           </a:xfrm>
           <a:prstGeom prst="roundRect">
@@ -10171,8 +10171,8 @@
         </p:nvSpPr>
         <p:spPr>
           <a:xfrm>
-            <a:off x="1540459" y="2169871"/>
-            <a:ext cx="1009498" cy="1009498"/>
+            <a:off x="1600200" y="2290572"/>
+            <a:ext cx="1316736" cy="1316736"/>
           </a:xfrm>
           <a:prstGeom prst="ellipse">
             <a:avLst/>
@@ -10196,8 +10196,8 @@
         </p:nvSpPr>
         <p:spPr>
           <a:xfrm>
-            <a:off x="2942539" y="2215757"/>
-            <a:ext cx="1009498" cy="917725"/>
+            <a:off x="3429000" y="2350424"/>
+            <a:ext cx="1316736" cy="1197033"/>
           </a:xfrm>
           <a:prstGeom prst="triangle">
             <a:avLst/>
@@ -10221,8 +10221,8 @@
         </p:nvSpPr>
         <p:spPr>
           <a:xfrm>
-            <a:off x="4344619" y="2169871"/>
-            <a:ext cx="1009498" cy="1009498"/>
+            <a:off x="5257800" y="2290572"/>
+            <a:ext cx="1316736" cy="1316736"/>
           </a:xfrm>
           <a:prstGeom prst="rect">
             <a:avLst/>
@@ -10246,7 +10246,7 @@
         </p:nvSpPr>
         <p:spPr>
           <a:xfrm>
-            <a:off x="548640" y="4654296"/>
+            <a:off x="548640" y="4928616"/>
             <a:ext cx="566928" cy="566928"/>
           </a:xfrm>
           <a:prstGeom prst="roundRect">
@@ -10293,7 +10293,7 @@
         </p:nvSpPr>
         <p:spPr>
           <a:xfrm>
-            <a:off x="1863090" y="4382262"/>
+            <a:off x="2503170" y="4656582"/>
             <a:ext cx="425196" cy="425196"/>
           </a:xfrm>
           <a:prstGeom prst="ellipse">
@@ -10318,7 +10318,7 @@
         </p:nvSpPr>
         <p:spPr>
           <a:xfrm>
-            <a:off x="2548890" y="4382262"/>
+            <a:off x="3188970" y="4656582"/>
             <a:ext cx="425196" cy="425196"/>
           </a:xfrm>
           <a:prstGeom prst="ellipse">
@@ -10343,7 +10343,7 @@
         </p:nvSpPr>
         <p:spPr>
           <a:xfrm>
-            <a:off x="3234690" y="4382262"/>
+            <a:off x="3874770" y="4656582"/>
             <a:ext cx="425196" cy="425196"/>
           </a:xfrm>
           <a:prstGeom prst="ellipse">
@@ -10368,7 +10368,7 @@
         </p:nvSpPr>
         <p:spPr>
           <a:xfrm>
-            <a:off x="3920490" y="4382262"/>
+            <a:off x="4560570" y="4656582"/>
             <a:ext cx="425196" cy="425196"/>
           </a:xfrm>
           <a:prstGeom prst="ellipse">
@@ -10393,7 +10393,7 @@
         </p:nvSpPr>
         <p:spPr>
           <a:xfrm>
-            <a:off x="4606290" y="4382262"/>
+            <a:off x="5246370" y="4656582"/>
             <a:ext cx="425196" cy="425196"/>
           </a:xfrm>
           <a:prstGeom prst="ellipse">
@@ -10418,7 +10418,7 @@
         </p:nvSpPr>
         <p:spPr>
           <a:xfrm>
-            <a:off x="1863090" y="5068062"/>
+            <a:off x="2503170" y="5342382"/>
             <a:ext cx="425196" cy="425196"/>
           </a:xfrm>
           <a:prstGeom prst="ellipse">
@@ -10443,7 +10443,7 @@
         </p:nvSpPr>
         <p:spPr>
           <a:xfrm>
-            <a:off x="2548890" y="5068062"/>
+            <a:off x="3188970" y="5342382"/>
             <a:ext cx="425196" cy="425196"/>
           </a:xfrm>
           <a:prstGeom prst="ellipse">
@@ -10468,7 +10468,7 @@
         </p:nvSpPr>
         <p:spPr>
           <a:xfrm>
-            <a:off x="3234690" y="5068062"/>
+            <a:off x="3874770" y="5342382"/>
             <a:ext cx="425196" cy="425196"/>
           </a:xfrm>
           <a:prstGeom prst="ellipse">
@@ -10493,7 +10493,7 @@
         </p:nvSpPr>
         <p:spPr>
           <a:xfrm>
-            <a:off x="1732788" y="4251960"/>
+            <a:off x="2372868" y="4526280"/>
             <a:ext cx="3429000" cy="1371600"/>
           </a:xfrm>
           <a:prstGeom prst="rect">

--- a/dist/초2/수학/자료와규칙/초2_수학_자료와규칙_01_분류하기.pptx
+++ b/dist/초2/수학/자료와규칙/초2_수학_자료와규칙_01_분류하기.pptx
@@ -122,13 +122,13 @@
   <p:extLst>
     <p:ext uri="{521415D9-36F7-43E2-AB2F-B90AF26B5E84}">
       <p14:sectionLst xmlns:p14="http://schemas.microsoft.com/office/powerpoint/2010/main">
-        <p14:section name="도입" id="{629eef6c-67ef-1877-5774-e854b1437d59}">
+        <p14:section name="도입" id="{bd0940b6-5e2d-6e21-d38c-a94ea910ac31}">
           <p14:sldIdLst>
             <p14:sldId id="256"/>
             <p14:sldId id="257"/>
           </p14:sldIdLst>
         </p14:section>
-        <p14:section name="개념" id="{b53c7d02-76bd-9bec-1720-a374ed1a6563}">
+        <p14:section name="개념" id="{c25d67af-6dad-2cb6-0aa4-826d35338a2b}">
           <p14:sldIdLst>
             <p14:sldId id="258"/>
             <p14:sldId id="259"/>
@@ -137,7 +137,7 @@
             <p14:sldId id="264"/>
           </p14:sldIdLst>
         </p14:section>
-        <p14:section name="연습" id="{889bad62-7761-5e67-dcfb-6b5a26474f83}">
+        <p14:section name="연습" id="{4ea55ad0-eeee-b747-9937-c6d719b773e7}">
           <p14:sldIdLst>
             <p14:sldId id="261"/>
             <p14:sldId id="262"/>
@@ -145,25 +145,25 @@
             <p14:sldId id="266"/>
           </p14:sldIdLst>
         </p14:section>
-        <p14:section name="개념" id="{1699f077-0817-62d0-e954-bf6e4ac90c21}">
+        <p14:section name="개념" id="{faa33ffc-95a6-970c-1005-fcbdc0097995}">
           <p14:sldIdLst/>
         </p14:section>
-        <p14:section name="연습" id="{e393aaa0-be32-395c-47a8-a2f6ca42e309}">
+        <p14:section name="연습" id="{bdbb0021-1a42-d7d5-fe93-2873bd1f30ac}">
           <p14:sldIdLst/>
         </p14:section>
-        <p14:section name="확인" id="{dc1901d6-b78e-7c82-b5db-ae31f97fef59}">
+        <p14:section name="확인" id="{75319783-86d3-8b3c-a8cc-5f43988ef51a}">
           <p14:sldIdLst>
             <p14:sldId id="267"/>
             <p14:sldId id="268"/>
             <p14:sldId id="269"/>
           </p14:sldIdLst>
         </p14:section>
-        <p14:section name="정리" id="{6712d2a4-5bd6-499e-081a-4ef0d1e22846}">
+        <p14:section name="정리" id="{d083f0a2-829e-c608-0d61-f34c8f05e523}">
           <p14:sldIdLst>
             <p14:sldId id="270"/>
           </p14:sldIdLst>
         </p14:section>
-        <p14:section name="보충" id="{e9414156-9e1e-1564-5786-441700687136}">
+        <p14:section name="보충" id="{b6d9d799-371e-8d6a-1bc4-d78d5c700497}">
           <p14:sldIdLst>
             <p14:sldId id="271"/>
           </p14:sldIdLst>
@@ -4128,7 +4128,7 @@
           </p:nvPr>
         </p:nvGraphicFramePr>
         <p:xfrm>
-          <a:off x="6254496" y="3037840"/>
+          <a:off x="6254496" y="3054350"/>
           <a:ext cx="5385816" cy="914400"/>
         </p:xfrm>
         <a:graphic>
@@ -4141,7 +4141,7 @@
                 <a:gridCol w="1346454"/>
                 <a:gridCol w="1346454"/>
               </a:tblGrid>
-              <a:tr h="528320">
+              <a:tr h="511810">
                 <a:tc>
                   <a:txBody>
                     <a:bodyPr/>
@@ -4415,7 +4415,7 @@
                   </a:tcPr>
                 </a:tc>
               </a:tr>
-              <a:tr h="528320">
+              <a:tr h="511810">
                 <a:tc>
                   <a:txBody>
                     <a:bodyPr/>
@@ -4963,7 +4963,7 @@
           </p:nvPr>
         </p:nvGraphicFramePr>
         <p:xfrm>
-          <a:off x="548640" y="3609340"/>
+          <a:off x="548640" y="3625850"/>
           <a:ext cx="5362956" cy="914400"/>
         </p:xfrm>
         <a:graphic>
@@ -4976,7 +4976,7 @@
                 <a:gridCol w="1340739"/>
                 <a:gridCol w="1340739"/>
               </a:tblGrid>
-              <a:tr h="528320">
+              <a:tr h="511810">
                 <a:tc>
                   <a:txBody>
                     <a:bodyPr/>
@@ -5250,7 +5250,7 @@
                   </a:tcPr>
                 </a:tc>
               </a:tr>
-              <a:tr h="528320">
+              <a:tr h="511810">
                 <a:tc>
                   <a:txBody>
                     <a:bodyPr/>
@@ -5590,7 +5590,7 @@
           </p:nvPr>
         </p:nvGraphicFramePr>
         <p:xfrm>
-          <a:off x="6277356" y="3609340"/>
+          <a:off x="6277356" y="3625850"/>
           <a:ext cx="5362956" cy="914400"/>
         </p:xfrm>
         <a:graphic>
@@ -5603,7 +5603,7 @@
                 <a:gridCol w="1340739"/>
                 <a:gridCol w="1340739"/>
               </a:tblGrid>
-              <a:tr h="528320">
+              <a:tr h="511810">
                 <a:tc>
                   <a:txBody>
                     <a:bodyPr/>
@@ -5877,7 +5877,7 @@
                   </a:tcPr>
                 </a:tc>
               </a:tr>
-              <a:tr h="528320">
+              <a:tr h="511810">
                 <a:tc>
                   <a:txBody>
                     <a:bodyPr/>
@@ -7166,7 +7166,7 @@
           </p:nvPr>
         </p:nvGraphicFramePr>
         <p:xfrm>
-          <a:off x="6254496" y="3037840"/>
+          <a:off x="6254496" y="3054350"/>
           <a:ext cx="5385816" cy="914400"/>
         </p:xfrm>
         <a:graphic>
@@ -7179,7 +7179,7 @@
                 <a:gridCol w="1346454"/>
                 <a:gridCol w="1346454"/>
               </a:tblGrid>
-              <a:tr h="528320">
+              <a:tr h="511810">
                 <a:tc>
                   <a:txBody>
                     <a:bodyPr/>
@@ -7453,7 +7453,7 @@
                   </a:tcPr>
                 </a:tc>
               </a:tr>
-              <a:tr h="528320">
+              <a:tr h="511810">
                 <a:tc>
                   <a:txBody>
                     <a:bodyPr/>
@@ -12216,12 +12216,12 @@
         </p:nvSpPr>
         <p:spPr>
           <a:xfrm>
-            <a:off x="548640" y="4251960"/>
-            <a:ext cx="5431536" cy="868680"/>
+            <a:off x="548640" y="3799840"/>
+            <a:ext cx="5431536" cy="1320800"/>
           </a:xfrm>
           <a:prstGeom prst="roundRect">
             <a:avLst>
-              <a:gd name="adj" fmla="val 12632"/>
+              <a:gd name="adj" fmla="val 8308"/>
             </a:avLst>
           </a:prstGeom>
           <a:solidFill>
@@ -12243,8 +12243,8 @@
         </p:nvSpPr>
         <p:spPr>
           <a:xfrm>
-            <a:off x="822960" y="4389120"/>
-            <a:ext cx="4882896" cy="594360"/>
+            <a:off x="822960" y="3937000"/>
+            <a:ext cx="4882896" cy="1046480"/>
           </a:xfrm>
           <a:prstGeom prst="rect">
             <a:avLst/>
@@ -12285,12 +12285,12 @@
         </p:nvSpPr>
         <p:spPr>
           <a:xfrm>
-            <a:off x="6208776" y="4251960"/>
-            <a:ext cx="5431536" cy="868680"/>
+            <a:off x="6208776" y="3799840"/>
+            <a:ext cx="5431536" cy="1320800"/>
           </a:xfrm>
           <a:prstGeom prst="roundRect">
             <a:avLst>
-              <a:gd name="adj" fmla="val 12632"/>
+              <a:gd name="adj" fmla="val 8308"/>
             </a:avLst>
           </a:prstGeom>
           <a:solidFill>
@@ -12312,8 +12312,8 @@
         </p:nvSpPr>
         <p:spPr>
           <a:xfrm>
-            <a:off x="6483096" y="4389120"/>
-            <a:ext cx="4882896" cy="594360"/>
+            <a:off x="6483096" y="3937000"/>
+            <a:ext cx="4882896" cy="1046480"/>
           </a:xfrm>
           <a:prstGeom prst="rect">
             <a:avLst/>
@@ -12354,12 +12354,12 @@
         </p:nvSpPr>
         <p:spPr>
           <a:xfrm>
-            <a:off x="548640" y="2183701"/>
-            <a:ext cx="1210437" cy="1210437"/>
+            <a:off x="980948" y="2011680"/>
+            <a:ext cx="1102360" cy="1102360"/>
           </a:xfrm>
           <a:prstGeom prst="roundRect">
             <a:avLst>
-              <a:gd name="adj" fmla="val 10576"/>
+              <a:gd name="adj" fmla="val 11613"/>
             </a:avLst>
           </a:prstGeom>
           <a:solidFill>
@@ -12379,7 +12379,7 @@
               <a:buNone/>
             </a:pPr>
             <a:r>
-              <a:rPr lang="ko-KR" altLang="en-US" sz="5200" b="1" dirty="0">
+              <a:rPr lang="ko-KR" altLang="en-US" sz="4800" b="1" dirty="0">
                 <a:solidFill>
                   <a:srgbClr val="1F2937"/>
                 </a:solidFill>
@@ -12389,7 +12389,7 @@
               </a:rPr>
               <a:t>●</a:t>
             </a:r>
-            <a:endParaRPr lang="ko-KR" sz="5200" dirty="0"/>
+            <a:endParaRPr lang="ko-KR" sz="4800" dirty="0"/>
           </a:p>
         </p:txBody>
       </p:sp>
@@ -12401,8 +12401,8 @@
         </p:nvSpPr>
         <p:spPr>
           <a:xfrm>
-            <a:off x="448056" y="3430714"/>
-            <a:ext cx="1411605" cy="402336"/>
+            <a:off x="880364" y="3150616"/>
+            <a:ext cx="1303528" cy="402336"/>
           </a:xfrm>
           <a:prstGeom prst="rect">
             <a:avLst/>
@@ -12440,12 +12440,12 @@
         </p:nvSpPr>
         <p:spPr>
           <a:xfrm>
-            <a:off x="1960245" y="2183701"/>
-            <a:ext cx="1210437" cy="1210437"/>
+            <a:off x="2284476" y="2011680"/>
+            <a:ext cx="1102360" cy="1102360"/>
           </a:xfrm>
           <a:prstGeom prst="roundRect">
             <a:avLst>
-              <a:gd name="adj" fmla="val 10576"/>
+              <a:gd name="adj" fmla="val 11613"/>
             </a:avLst>
           </a:prstGeom>
           <a:solidFill>
@@ -12465,7 +12465,7 @@
               <a:buNone/>
             </a:pPr>
             <a:r>
-              <a:rPr lang="ko-KR" altLang="en-US" sz="5200" b="1" dirty="0">
+              <a:rPr lang="ko-KR" altLang="en-US" sz="4800" b="1" dirty="0">
                 <a:solidFill>
                   <a:srgbClr val="1F2937"/>
                 </a:solidFill>
@@ -12475,7 +12475,7 @@
               </a:rPr>
               <a:t>△</a:t>
             </a:r>
-            <a:endParaRPr lang="ko-KR" sz="5200" dirty="0"/>
+            <a:endParaRPr lang="ko-KR" sz="4800" dirty="0"/>
           </a:p>
         </p:txBody>
       </p:sp>
@@ -12487,8 +12487,8 @@
         </p:nvSpPr>
         <p:spPr>
           <a:xfrm>
-            <a:off x="1859661" y="3430714"/>
-            <a:ext cx="1411605" cy="402336"/>
+            <a:off x="2183892" y="3150616"/>
+            <a:ext cx="1303528" cy="402336"/>
           </a:xfrm>
           <a:prstGeom prst="rect">
             <a:avLst/>
@@ -12526,12 +12526,12 @@
         </p:nvSpPr>
         <p:spPr>
           <a:xfrm>
-            <a:off x="3371850" y="2183701"/>
-            <a:ext cx="1210437" cy="1210437"/>
+            <a:off x="3588004" y="2011680"/>
+            <a:ext cx="1102360" cy="1102360"/>
           </a:xfrm>
           <a:prstGeom prst="roundRect">
             <a:avLst>
-              <a:gd name="adj" fmla="val 10576"/>
+              <a:gd name="adj" fmla="val 11613"/>
             </a:avLst>
           </a:prstGeom>
           <a:solidFill>
@@ -12551,7 +12551,7 @@
               <a:buNone/>
             </a:pPr>
             <a:r>
-              <a:rPr lang="ko-KR" altLang="en-US" sz="5200" b="1" dirty="0">
+              <a:rPr lang="ko-KR" altLang="en-US" sz="4800" b="1" dirty="0">
                 <a:solidFill>
                   <a:srgbClr val="1F2937"/>
                 </a:solidFill>
@@ -12561,7 +12561,7 @@
               </a:rPr>
               <a:t>■</a:t>
             </a:r>
-            <a:endParaRPr lang="ko-KR" sz="5200" dirty="0"/>
+            <a:endParaRPr lang="ko-KR" sz="4800" dirty="0"/>
           </a:p>
         </p:txBody>
       </p:sp>
@@ -12573,8 +12573,8 @@
         </p:nvSpPr>
         <p:spPr>
           <a:xfrm>
-            <a:off x="3271266" y="3430714"/>
-            <a:ext cx="1411605" cy="402336"/>
+            <a:off x="3487420" y="3150616"/>
+            <a:ext cx="1303528" cy="402336"/>
           </a:xfrm>
           <a:prstGeom prst="rect">
             <a:avLst/>
@@ -12612,12 +12612,12 @@
         </p:nvSpPr>
         <p:spPr>
           <a:xfrm>
-            <a:off x="4783455" y="2183701"/>
-            <a:ext cx="1210437" cy="1210437"/>
+            <a:off x="4891532" y="2011680"/>
+            <a:ext cx="1102360" cy="1102360"/>
           </a:xfrm>
           <a:prstGeom prst="roundRect">
             <a:avLst>
-              <a:gd name="adj" fmla="val 10576"/>
+              <a:gd name="adj" fmla="val 11613"/>
             </a:avLst>
           </a:prstGeom>
           <a:solidFill>
@@ -12637,7 +12637,7 @@
               <a:buNone/>
             </a:pPr>
             <a:r>
-              <a:rPr lang="ko-KR" altLang="en-US" sz="5200" b="1" dirty="0">
+              <a:rPr lang="ko-KR" altLang="en-US" sz="4800" b="1" dirty="0">
                 <a:solidFill>
                   <a:srgbClr val="1F2937"/>
                 </a:solidFill>
@@ -12647,7 +12647,7 @@
               </a:rPr>
               <a:t>○</a:t>
             </a:r>
-            <a:endParaRPr lang="ko-KR" sz="5200" dirty="0"/>
+            <a:endParaRPr lang="ko-KR" sz="4800" dirty="0"/>
           </a:p>
         </p:txBody>
       </p:sp>
@@ -12659,8 +12659,8 @@
         </p:nvSpPr>
         <p:spPr>
           <a:xfrm>
-            <a:off x="4682871" y="3430714"/>
-            <a:ext cx="1411605" cy="402336"/>
+            <a:off x="4790948" y="3150616"/>
+            <a:ext cx="1303528" cy="402336"/>
           </a:xfrm>
           <a:prstGeom prst="rect">
             <a:avLst/>
@@ -12698,12 +12698,12 @@
         </p:nvSpPr>
         <p:spPr>
           <a:xfrm>
-            <a:off x="6195060" y="2183701"/>
-            <a:ext cx="1210437" cy="1210437"/>
+            <a:off x="6195060" y="2011680"/>
+            <a:ext cx="1102360" cy="1102360"/>
           </a:xfrm>
           <a:prstGeom prst="roundRect">
             <a:avLst>
-              <a:gd name="adj" fmla="val 10576"/>
+              <a:gd name="adj" fmla="val 11613"/>
             </a:avLst>
           </a:prstGeom>
           <a:solidFill>
@@ -12723,7 +12723,7 @@
               <a:buNone/>
             </a:pPr>
             <a:r>
-              <a:rPr lang="ko-KR" altLang="en-US" sz="5200" b="1" dirty="0">
+              <a:rPr lang="ko-KR" altLang="en-US" sz="4800" b="1" dirty="0">
                 <a:solidFill>
                   <a:srgbClr val="1F2937"/>
                 </a:solidFill>
@@ -12733,7 +12733,7 @@
               </a:rPr>
               <a:t>▲</a:t>
             </a:r>
-            <a:endParaRPr lang="ko-KR" sz="5200" dirty="0"/>
+            <a:endParaRPr lang="ko-KR" sz="4800" dirty="0"/>
           </a:p>
         </p:txBody>
       </p:sp>
@@ -12745,8 +12745,8 @@
         </p:nvSpPr>
         <p:spPr>
           <a:xfrm>
-            <a:off x="6094476" y="3430714"/>
-            <a:ext cx="1411605" cy="402336"/>
+            <a:off x="6094476" y="3150616"/>
+            <a:ext cx="1303528" cy="402336"/>
           </a:xfrm>
           <a:prstGeom prst="rect">
             <a:avLst/>
@@ -12784,12 +12784,12 @@
         </p:nvSpPr>
         <p:spPr>
           <a:xfrm>
-            <a:off x="7606665" y="2183701"/>
-            <a:ext cx="1210437" cy="1210437"/>
+            <a:off x="7498588" y="2011680"/>
+            <a:ext cx="1102360" cy="1102360"/>
           </a:xfrm>
           <a:prstGeom prst="roundRect">
             <a:avLst>
-              <a:gd name="adj" fmla="val 10576"/>
+              <a:gd name="adj" fmla="val 11613"/>
             </a:avLst>
           </a:prstGeom>
           <a:solidFill>
@@ -12809,7 +12809,7 @@
               <a:buNone/>
             </a:pPr>
             <a:r>
-              <a:rPr lang="ko-KR" altLang="en-US" sz="5200" b="1" dirty="0">
+              <a:rPr lang="ko-KR" altLang="en-US" sz="4800" b="1" dirty="0">
                 <a:solidFill>
                   <a:srgbClr val="1F2937"/>
                 </a:solidFill>
@@ -12819,7 +12819,7 @@
               </a:rPr>
               <a:t>●</a:t>
             </a:r>
-            <a:endParaRPr lang="ko-KR" sz="5200" dirty="0"/>
+            <a:endParaRPr lang="ko-KR" sz="4800" dirty="0"/>
           </a:p>
         </p:txBody>
       </p:sp>
@@ -12831,8 +12831,8 @@
         </p:nvSpPr>
         <p:spPr>
           <a:xfrm>
-            <a:off x="7506081" y="3430714"/>
-            <a:ext cx="1411605" cy="402336"/>
+            <a:off x="7398004" y="3150616"/>
+            <a:ext cx="1303528" cy="402336"/>
           </a:xfrm>
           <a:prstGeom prst="rect">
             <a:avLst/>
@@ -12870,12 +12870,12 @@
         </p:nvSpPr>
         <p:spPr>
           <a:xfrm>
-            <a:off x="9018270" y="2183701"/>
-            <a:ext cx="1210437" cy="1210437"/>
+            <a:off x="8802116" y="2011680"/>
+            <a:ext cx="1102360" cy="1102360"/>
           </a:xfrm>
           <a:prstGeom prst="roundRect">
             <a:avLst>
-              <a:gd name="adj" fmla="val 10576"/>
+              <a:gd name="adj" fmla="val 11613"/>
             </a:avLst>
           </a:prstGeom>
           <a:solidFill>
@@ -12895,7 +12895,7 @@
               <a:buNone/>
             </a:pPr>
             <a:r>
-              <a:rPr lang="ko-KR" altLang="en-US" sz="5200" b="1" dirty="0">
+              <a:rPr lang="ko-KR" altLang="en-US" sz="4800" b="1" dirty="0">
                 <a:solidFill>
                   <a:srgbClr val="1F2937"/>
                 </a:solidFill>
@@ -12905,7 +12905,7 @@
               </a:rPr>
               <a:t>□</a:t>
             </a:r>
-            <a:endParaRPr lang="ko-KR" sz="5200" dirty="0"/>
+            <a:endParaRPr lang="ko-KR" sz="4800" dirty="0"/>
           </a:p>
         </p:txBody>
       </p:sp>
@@ -12917,8 +12917,8 @@
         </p:nvSpPr>
         <p:spPr>
           <a:xfrm>
-            <a:off x="8917686" y="3430714"/>
-            <a:ext cx="1411605" cy="402336"/>
+            <a:off x="8701532" y="3150616"/>
+            <a:ext cx="1303528" cy="402336"/>
           </a:xfrm>
           <a:prstGeom prst="rect">
             <a:avLst/>
@@ -12956,12 +12956,12 @@
         </p:nvSpPr>
         <p:spPr>
           <a:xfrm>
-            <a:off x="10429875" y="2183701"/>
-            <a:ext cx="1210437" cy="1210437"/>
+            <a:off x="10105644" y="2011680"/>
+            <a:ext cx="1102360" cy="1102360"/>
           </a:xfrm>
           <a:prstGeom prst="roundRect">
             <a:avLst>
-              <a:gd name="adj" fmla="val 10576"/>
+              <a:gd name="adj" fmla="val 11613"/>
             </a:avLst>
           </a:prstGeom>
           <a:solidFill>
@@ -12981,7 +12981,7 @@
               <a:buNone/>
             </a:pPr>
             <a:r>
-              <a:rPr lang="ko-KR" altLang="en-US" sz="5200" b="1" dirty="0">
+              <a:rPr lang="ko-KR" altLang="en-US" sz="4800" b="1" dirty="0">
                 <a:solidFill>
                   <a:srgbClr val="1F2937"/>
                 </a:solidFill>
@@ -12991,7 +12991,7 @@
               </a:rPr>
               <a:t>●</a:t>
             </a:r>
-            <a:endParaRPr lang="ko-KR" sz="5200" dirty="0"/>
+            <a:endParaRPr lang="ko-KR" sz="4800" dirty="0"/>
           </a:p>
         </p:txBody>
       </p:sp>
@@ -13003,8 +13003,8 @@
         </p:nvSpPr>
         <p:spPr>
           <a:xfrm>
-            <a:off x="10329291" y="3430714"/>
-            <a:ext cx="1411605" cy="402336"/>
+            <a:off x="10005060" y="3150616"/>
+            <a:ext cx="1303528" cy="402336"/>
           </a:xfrm>
           <a:prstGeom prst="rect">
             <a:avLst/>
@@ -15053,7 +15053,7 @@
           </p:nvPr>
         </p:nvGraphicFramePr>
         <p:xfrm>
-          <a:off x="6254496" y="2820162"/>
+          <a:off x="6254496" y="2836672"/>
           <a:ext cx="5385816" cy="914400"/>
         </p:xfrm>
         <a:graphic>
@@ -15066,7 +15066,7 @@
                 <a:gridCol w="1346454"/>
                 <a:gridCol w="1346454"/>
               </a:tblGrid>
-              <a:tr h="528320">
+              <a:tr h="511810">
                 <a:tc>
                   <a:txBody>
                     <a:bodyPr/>
@@ -15340,7 +15340,7 @@
                   </a:tcPr>
                 </a:tc>
               </a:tr>
-              <a:tr h="528320">
+              <a:tr h="511810">
                 <a:tc>
                   <a:txBody>
                     <a:bodyPr/>
@@ -15786,7 +15786,7 @@
           </p:nvPr>
         </p:nvGraphicFramePr>
         <p:xfrm>
-          <a:off x="6813652" y="3883660"/>
+          <a:off x="6813652" y="3900170"/>
           <a:ext cx="4826660" cy="914400"/>
         </p:xfrm>
         <a:graphic>
@@ -15798,7 +15798,7 @@
                 <a:gridCol w="1608887"/>
                 <a:gridCol w="1608887"/>
               </a:tblGrid>
-              <a:tr h="528320">
+              <a:tr h="511810">
                 <a:tc>
                   <a:txBody>
                     <a:bodyPr/>
@@ -16004,7 +16004,7 @@
                   </a:tcPr>
                 </a:tc>
               </a:tr>
-              <a:tr h="528320">
+              <a:tr h="511810">
                 <a:tc>
                   <a:txBody>
                     <a:bodyPr/>
